--- a/Imag/fig/fig_03_recta.pptx
+++ b/Imag/fig/fig_03_recta.pptx
@@ -3344,10 +3344,10 @@
       </p:grpSpPr>
       <p:grpSp>
         <p:nvGrpSpPr>
-          <p:cNvPr id="16" name="Group 15">
-            <a:extLst>
-              <a:ext uri="{FF2B5EF4-FFF2-40B4-BE49-F238E27FC236}">
-                <a16:creationId xmlns:a16="http://schemas.microsoft.com/office/drawing/2014/main" id="{2D97B3B7-7F95-B92C-03E0-D8D73D1184FD}"/>
+          <p:cNvPr id="17" name="Group 16">
+            <a:extLst>
+              <a:ext uri="{FF2B5EF4-FFF2-40B4-BE49-F238E27FC236}">
+                <a16:creationId xmlns:a16="http://schemas.microsoft.com/office/drawing/2014/main" id="{AD4237FB-6726-5DC6-495E-281AAE4BB615}"/>
               </a:ext>
             </a:extLst>
           </p:cNvPr>

--- a/Imag/fig/fig_03_recta.pptx
+++ b/Imag/fig/fig_03_recta.pptx
@@ -3613,7 +3613,7 @@
             <a:p>
               <a:r>
                 <a:rPr lang="en-CO" sz="2400" b="1" dirty="0"/>
-                <a:t>55.0</a:t>
+                <a:t>55.7</a:t>
               </a:r>
             </a:p>
           </p:txBody>
@@ -3693,7 +3693,7 @@
             <a:p>
               <a:r>
                 <a:rPr lang="en-CO" sz="2400" dirty="0"/>
-                <a:t>8.8cm</a:t>
+                <a:t>9.5cm</a:t>
               </a:r>
             </a:p>
           </p:txBody>

--- a/Imag/fig/fig_03_recta.pptx
+++ b/Imag/fig/fig_03_recta.pptx
@@ -6,6 +6,7 @@
   </p:sldMasterIdLst>
   <p:sldIdLst>
     <p:sldId id="256" r:id="rId2"/>
+    <p:sldId id="257" r:id="rId3"/>
   </p:sldIdLst>
   <p:sldSz cx="12192000" cy="6858000"/>
   <p:notesSz cx="6858000" cy="9144000"/>
@@ -3747,6 +3748,379 @@
 </p:sld>
 </file>
 
+<file path=ppt/slides/slide2.xml><?xml version="1.0" encoding="utf-8"?>
+<p:sld xmlns:a="http://schemas.openxmlformats.org/drawingml/2006/main" xmlns:r="http://schemas.openxmlformats.org/officeDocument/2006/relationships" xmlns:p="http://schemas.openxmlformats.org/presentationml/2006/main">
+  <p:cSld>
+    <p:spTree>
+      <p:nvGrpSpPr>
+        <p:cNvPr id="1" name=""/>
+        <p:cNvGrpSpPr/>
+        <p:nvPr/>
+      </p:nvGrpSpPr>
+      <p:grpSpPr>
+        <a:xfrm>
+          <a:off x="0" y="0"/>
+          <a:ext cx="0" cy="0"/>
+          <a:chOff x="0" y="0"/>
+          <a:chExt cx="0" cy="0"/>
+        </a:xfrm>
+      </p:grpSpPr>
+      <p:grpSp>
+        <p:nvGrpSpPr>
+          <p:cNvPr id="14" name="Group 13">
+            <a:extLst>
+              <a:ext uri="{FF2B5EF4-FFF2-40B4-BE49-F238E27FC236}">
+                <a16:creationId xmlns:a16="http://schemas.microsoft.com/office/drawing/2014/main" id="{B86F1482-FF04-0452-7C2F-4B099BFBBF8B}"/>
+              </a:ext>
+            </a:extLst>
+          </p:cNvPr>
+          <p:cNvGrpSpPr/>
+          <p:nvPr/>
+        </p:nvGrpSpPr>
+        <p:grpSpPr>
+          <a:xfrm>
+            <a:off x="339418" y="-8005"/>
+            <a:ext cx="9520655" cy="6504678"/>
+            <a:chOff x="339418" y="-8005"/>
+            <a:chExt cx="9520655" cy="6504678"/>
+          </a:xfrm>
+        </p:grpSpPr>
+        <p:pic>
+          <p:nvPicPr>
+            <p:cNvPr id="8" name="Picture 7">
+              <a:extLst>
+                <a:ext uri="{FF2B5EF4-FFF2-40B4-BE49-F238E27FC236}">
+                  <a16:creationId xmlns:a16="http://schemas.microsoft.com/office/drawing/2014/main" id="{94036380-166F-AE0E-1D58-B660FD424641}"/>
+                </a:ext>
+              </a:extLst>
+            </p:cNvPr>
+            <p:cNvPicPr>
+              <a:picLocks noChangeAspect="1"/>
+            </p:cNvPicPr>
+            <p:nvPr/>
+          </p:nvPicPr>
+          <p:blipFill>
+            <a:blip r:embed="rId2"/>
+            <a:stretch>
+              <a:fillRect/>
+            </a:stretch>
+          </p:blipFill>
+          <p:spPr>
+            <a:xfrm>
+              <a:off x="987751" y="0"/>
+              <a:ext cx="8872322" cy="6496673"/>
+            </a:xfrm>
+            <a:prstGeom prst="rect">
+              <a:avLst/>
+            </a:prstGeom>
+          </p:spPr>
+        </p:pic>
+        <p:sp>
+          <p:nvSpPr>
+            <p:cNvPr id="10" name="Right Brace 9">
+              <a:extLst>
+                <a:ext uri="{FF2B5EF4-FFF2-40B4-BE49-F238E27FC236}">
+                  <a16:creationId xmlns:a16="http://schemas.microsoft.com/office/drawing/2014/main" id="{7CC3EDD9-7C7B-6CD5-85B0-1B0F4A5B2795}"/>
+                </a:ext>
+              </a:extLst>
+            </p:cNvPr>
+            <p:cNvSpPr/>
+            <p:nvPr/>
+          </p:nvSpPr>
+          <p:spPr>
+            <a:xfrm rot="7165058">
+              <a:off x="4008897" y="-643432"/>
+              <a:ext cx="1124402" cy="8463360"/>
+            </a:xfrm>
+            <a:prstGeom prst="rightBrace">
+              <a:avLst/>
+            </a:prstGeom>
+            <a:ln w="88900">
+              <a:solidFill>
+                <a:schemeClr val="accent2">
+                  <a:alpha val="95000"/>
+                </a:schemeClr>
+              </a:solidFill>
+            </a:ln>
+          </p:spPr>
+          <p:style>
+            <a:lnRef idx="3">
+              <a:schemeClr val="accent2"/>
+            </a:lnRef>
+            <a:fillRef idx="0">
+              <a:schemeClr val="accent2"/>
+            </a:fillRef>
+            <a:effectRef idx="2">
+              <a:schemeClr val="accent2"/>
+            </a:effectRef>
+            <a:fontRef idx="minor">
+              <a:schemeClr val="tx1"/>
+            </a:fontRef>
+          </p:style>
+          <p:txBody>
+            <a:bodyPr rtlCol="0" anchor="ctr"/>
+            <a:lstStyle/>
+            <a:p>
+              <a:pPr algn="ctr"/>
+              <a:endParaRPr lang="en-CO" dirty="0"/>
+            </a:p>
+          </p:txBody>
+        </p:sp>
+        <p:sp>
+          <p:nvSpPr>
+            <p:cNvPr id="11" name="Right Brace 10">
+              <a:extLst>
+                <a:ext uri="{FF2B5EF4-FFF2-40B4-BE49-F238E27FC236}">
+                  <a16:creationId xmlns:a16="http://schemas.microsoft.com/office/drawing/2014/main" id="{B9E4FAC4-9EF5-7EE3-B812-6027F059B01D}"/>
+                </a:ext>
+              </a:extLst>
+            </p:cNvPr>
+            <p:cNvSpPr/>
+            <p:nvPr/>
+          </p:nvSpPr>
+          <p:spPr>
+            <a:xfrm rot="1651586">
+              <a:off x="4298581" y="1639714"/>
+              <a:ext cx="918888" cy="1117846"/>
+            </a:xfrm>
+            <a:prstGeom prst="rightBrace">
+              <a:avLst/>
+            </a:prstGeom>
+            <a:ln w="85725">
+              <a:solidFill>
+                <a:schemeClr val="accent2"/>
+              </a:solidFill>
+            </a:ln>
+          </p:spPr>
+          <p:style>
+            <a:lnRef idx="3">
+              <a:schemeClr val="accent2"/>
+            </a:lnRef>
+            <a:fillRef idx="0">
+              <a:schemeClr val="accent2"/>
+            </a:fillRef>
+            <a:effectRef idx="2">
+              <a:schemeClr val="accent2"/>
+            </a:effectRef>
+            <a:fontRef idx="minor">
+              <a:schemeClr val="tx1"/>
+            </a:fontRef>
+          </p:style>
+          <p:txBody>
+            <a:bodyPr rtlCol="0" anchor="ctr"/>
+            <a:lstStyle/>
+            <a:p>
+              <a:pPr algn="ctr"/>
+              <a:endParaRPr lang="en-CO"/>
+            </a:p>
+          </p:txBody>
+        </p:sp>
+        <p:sp>
+          <p:nvSpPr>
+            <p:cNvPr id="5" name="TextBox 4">
+              <a:extLst>
+                <a:ext uri="{FF2B5EF4-FFF2-40B4-BE49-F238E27FC236}">
+                  <a16:creationId xmlns:a16="http://schemas.microsoft.com/office/drawing/2014/main" id="{530FCDB4-2363-D1F5-8287-9A3A82EEF0A9}"/>
+                </a:ext>
+              </a:extLst>
+            </p:cNvPr>
+            <p:cNvSpPr txBox="1"/>
+            <p:nvPr/>
+          </p:nvSpPr>
+          <p:spPr>
+            <a:xfrm>
+              <a:off x="1588625" y="-8005"/>
+              <a:ext cx="2041742" cy="369332"/>
+            </a:xfrm>
+            <a:prstGeom prst="rect">
+              <a:avLst/>
+            </a:prstGeom>
+            <a:solidFill>
+              <a:schemeClr val="bg1">
+                <a:alpha val="78000"/>
+              </a:schemeClr>
+            </a:solidFill>
+          </p:spPr>
+          <p:txBody>
+            <a:bodyPr wrap="square" rtlCol="0">
+              <a:spAutoFit/>
+            </a:bodyPr>
+            <a:lstStyle/>
+            <a:p>
+              <a:r>
+                <a:rPr lang="en-CO" dirty="0">
+                  <a:solidFill>
+                    <a:srgbClr val="FF0000"/>
+                  </a:solidFill>
+                </a:rPr>
+                <a:t>Calle 52 con 49</a:t>
+              </a:r>
+            </a:p>
+          </p:txBody>
+        </p:sp>
+        <p:sp>
+          <p:nvSpPr>
+            <p:cNvPr id="12" name="TextBox 11">
+              <a:extLst>
+                <a:ext uri="{FF2B5EF4-FFF2-40B4-BE49-F238E27FC236}">
+                  <a16:creationId xmlns:a16="http://schemas.microsoft.com/office/drawing/2014/main" id="{D6BF2CB5-2660-2660-3807-81F1B7C74342}"/>
+                </a:ext>
+              </a:extLst>
+            </p:cNvPr>
+            <p:cNvSpPr txBox="1"/>
+            <p:nvPr/>
+          </p:nvSpPr>
+          <p:spPr>
+            <a:xfrm>
+              <a:off x="2768160" y="4265458"/>
+              <a:ext cx="2542876" cy="646331"/>
+            </a:xfrm>
+            <a:prstGeom prst="rect">
+              <a:avLst/>
+            </a:prstGeom>
+            <a:solidFill>
+              <a:schemeClr val="bg1">
+                <a:alpha val="78000"/>
+              </a:schemeClr>
+            </a:solidFill>
+          </p:spPr>
+          <p:txBody>
+            <a:bodyPr wrap="square" rtlCol="0">
+              <a:spAutoFit/>
+            </a:bodyPr>
+            <a:lstStyle/>
+            <a:p>
+              <a:r>
+                <a:rPr lang="en-CO" dirty="0">
+                  <a:solidFill>
+                    <a:srgbClr val="FF0000"/>
+                  </a:solidFill>
+                </a:rPr>
+                <a:t>|39 – 49| = 10 Carreras</a:t>
+              </a:r>
+            </a:p>
+            <a:p>
+              <a:r>
+                <a:rPr lang="en-CO" dirty="0">
+                  <a:solidFill>
+                    <a:srgbClr val="FF0000"/>
+                  </a:solidFill>
+                </a:rPr>
+                <a:t>(10x80 metros)    </a:t>
+              </a:r>
+            </a:p>
+          </p:txBody>
+        </p:sp>
+        <p:sp>
+          <p:nvSpPr>
+            <p:cNvPr id="9" name="TextBox 8">
+              <a:extLst>
+                <a:ext uri="{FF2B5EF4-FFF2-40B4-BE49-F238E27FC236}">
+                  <a16:creationId xmlns:a16="http://schemas.microsoft.com/office/drawing/2014/main" id="{65BADCA5-67FC-713C-9381-2B985FA1F319}"/>
+                </a:ext>
+              </a:extLst>
+            </p:cNvPr>
+            <p:cNvSpPr txBox="1"/>
+            <p:nvPr/>
+          </p:nvSpPr>
+          <p:spPr>
+            <a:xfrm>
+              <a:off x="8154445" y="5123304"/>
+              <a:ext cx="1705627" cy="369332"/>
+            </a:xfrm>
+            <a:prstGeom prst="rect">
+              <a:avLst/>
+            </a:prstGeom>
+            <a:solidFill>
+              <a:schemeClr val="bg1">
+                <a:alpha val="78000"/>
+              </a:schemeClr>
+            </a:solidFill>
+          </p:spPr>
+          <p:txBody>
+            <a:bodyPr wrap="square" rtlCol="0">
+              <a:spAutoFit/>
+            </a:bodyPr>
+            <a:lstStyle/>
+            <a:p>
+              <a:r>
+                <a:rPr lang="en-CO" dirty="0">
+                  <a:solidFill>
+                    <a:srgbClr val="FF0000"/>
+                  </a:solidFill>
+                </a:rPr>
+                <a:t>Cr 39 con 50</a:t>
+              </a:r>
+            </a:p>
+          </p:txBody>
+        </p:sp>
+        <p:sp>
+          <p:nvSpPr>
+            <p:cNvPr id="13" name="TextBox 12">
+              <a:extLst>
+                <a:ext uri="{FF2B5EF4-FFF2-40B4-BE49-F238E27FC236}">
+                  <a16:creationId xmlns:a16="http://schemas.microsoft.com/office/drawing/2014/main" id="{4F749713-7648-93C1-ECB2-5E480A626FFC}"/>
+                </a:ext>
+              </a:extLst>
+            </p:cNvPr>
+            <p:cNvSpPr txBox="1"/>
+            <p:nvPr/>
+          </p:nvSpPr>
+          <p:spPr>
+            <a:xfrm>
+              <a:off x="5382369" y="1875471"/>
+              <a:ext cx="2542876" cy="646331"/>
+            </a:xfrm>
+            <a:prstGeom prst="rect">
+              <a:avLst/>
+            </a:prstGeom>
+            <a:solidFill>
+              <a:schemeClr val="bg1">
+                <a:alpha val="78000"/>
+              </a:schemeClr>
+            </a:solidFill>
+          </p:spPr>
+          <p:txBody>
+            <a:bodyPr wrap="square" rtlCol="0">
+              <a:spAutoFit/>
+            </a:bodyPr>
+            <a:lstStyle/>
+            <a:p>
+              <a:r>
+                <a:rPr lang="en-CO" dirty="0">
+                  <a:solidFill>
+                    <a:srgbClr val="FF0000"/>
+                  </a:solidFill>
+                </a:rPr>
+                <a:t>|52 – 50| = 2 Calles</a:t>
+              </a:r>
+            </a:p>
+            <a:p>
+              <a:r>
+                <a:rPr lang="en-CO" dirty="0">
+                  <a:solidFill>
+                    <a:srgbClr val="FF0000"/>
+                  </a:solidFill>
+                </a:rPr>
+                <a:t>(2x80 metros)    </a:t>
+              </a:r>
+            </a:p>
+          </p:txBody>
+        </p:sp>
+      </p:grpSp>
+    </p:spTree>
+    <p:extLst>
+      <p:ext uri="{BB962C8B-B14F-4D97-AF65-F5344CB8AC3E}">
+        <p14:creationId xmlns:p14="http://schemas.microsoft.com/office/powerpoint/2010/main" val="43733477"/>
+      </p:ext>
+    </p:extLst>
+  </p:cSld>
+  <p:clrMapOvr>
+    <a:masterClrMapping/>
+  </p:clrMapOvr>
+</p:sld>
+</file>
+
 <file path=ppt/theme/theme1.xml><?xml version="1.0" encoding="utf-8"?>
 <a:theme xmlns:a="http://schemas.openxmlformats.org/drawingml/2006/main" name="Office Theme">
   <a:themeElements>

--- a/Imag/fig/fig_03_recta.pptx
+++ b/Imag/fig/fig_03_recta.pptx
@@ -3765,349 +3765,328 @@
           <a:chExt cx="0" cy="0"/>
         </a:xfrm>
       </p:grpSpPr>
-      <p:grpSp>
-        <p:nvGrpSpPr>
-          <p:cNvPr id="14" name="Group 13">
-            <a:extLst>
-              <a:ext uri="{FF2B5EF4-FFF2-40B4-BE49-F238E27FC236}">
-                <a16:creationId xmlns:a16="http://schemas.microsoft.com/office/drawing/2014/main" id="{B86F1482-FF04-0452-7C2F-4B099BFBBF8B}"/>
-              </a:ext>
-            </a:extLst>
-          </p:cNvPr>
-          <p:cNvGrpSpPr/>
+      <p:pic>
+        <p:nvPicPr>
+          <p:cNvPr id="8" name="Picture 7">
+            <a:extLst>
+              <a:ext uri="{FF2B5EF4-FFF2-40B4-BE49-F238E27FC236}">
+                <a16:creationId xmlns:a16="http://schemas.microsoft.com/office/drawing/2014/main" id="{94036380-166F-AE0E-1D58-B660FD424641}"/>
+              </a:ext>
+            </a:extLst>
+          </p:cNvPr>
+          <p:cNvPicPr>
+            <a:picLocks noChangeAspect="1"/>
+          </p:cNvPicPr>
           <p:nvPr/>
-        </p:nvGrpSpPr>
-        <p:grpSpPr>
+        </p:nvPicPr>
+        <p:blipFill>
+          <a:blip r:embed="rId2"/>
+          <a:stretch>
+            <a:fillRect/>
+          </a:stretch>
+        </p:blipFill>
+        <p:spPr>
           <a:xfrm>
-            <a:off x="339418" y="-8005"/>
-            <a:ext cx="9520655" cy="6504678"/>
-            <a:chOff x="339418" y="-8005"/>
-            <a:chExt cx="9520655" cy="6504678"/>
+            <a:off x="987751" y="0"/>
+            <a:ext cx="8872322" cy="6496673"/>
           </a:xfrm>
-        </p:grpSpPr>
-        <p:pic>
-          <p:nvPicPr>
-            <p:cNvPr id="8" name="Picture 7">
-              <a:extLst>
-                <a:ext uri="{FF2B5EF4-FFF2-40B4-BE49-F238E27FC236}">
-                  <a16:creationId xmlns:a16="http://schemas.microsoft.com/office/drawing/2014/main" id="{94036380-166F-AE0E-1D58-B660FD424641}"/>
-                </a:ext>
-              </a:extLst>
-            </p:cNvPr>
-            <p:cNvPicPr>
-              <a:picLocks noChangeAspect="1"/>
-            </p:cNvPicPr>
-            <p:nvPr/>
-          </p:nvPicPr>
-          <p:blipFill>
-            <a:blip r:embed="rId2"/>
-            <a:stretch>
-              <a:fillRect/>
-            </a:stretch>
-          </p:blipFill>
-          <p:spPr>
-            <a:xfrm>
-              <a:off x="987751" y="0"/>
-              <a:ext cx="8872322" cy="6496673"/>
-            </a:xfrm>
-            <a:prstGeom prst="rect">
-              <a:avLst/>
-            </a:prstGeom>
-          </p:spPr>
-        </p:pic>
-        <p:sp>
-          <p:nvSpPr>
-            <p:cNvPr id="10" name="Right Brace 9">
-              <a:extLst>
-                <a:ext uri="{FF2B5EF4-FFF2-40B4-BE49-F238E27FC236}">
-                  <a16:creationId xmlns:a16="http://schemas.microsoft.com/office/drawing/2014/main" id="{7CC3EDD9-7C7B-6CD5-85B0-1B0F4A5B2795}"/>
-                </a:ext>
-              </a:extLst>
-            </p:cNvPr>
-            <p:cNvSpPr/>
-            <p:nvPr/>
-          </p:nvSpPr>
-          <p:spPr>
-            <a:xfrm rot="7165058">
-              <a:off x="4008897" y="-643432"/>
-              <a:ext cx="1124402" cy="8463360"/>
-            </a:xfrm>
-            <a:prstGeom prst="rightBrace">
-              <a:avLst/>
-            </a:prstGeom>
-            <a:ln w="88900">
-              <a:solidFill>
-                <a:schemeClr val="accent2">
-                  <a:alpha val="95000"/>
-                </a:schemeClr>
-              </a:solidFill>
-            </a:ln>
-          </p:spPr>
-          <p:style>
-            <a:lnRef idx="3">
-              <a:schemeClr val="accent2"/>
-            </a:lnRef>
-            <a:fillRef idx="0">
-              <a:schemeClr val="accent2"/>
-            </a:fillRef>
-            <a:effectRef idx="2">
-              <a:schemeClr val="accent2"/>
-            </a:effectRef>
-            <a:fontRef idx="minor">
-              <a:schemeClr val="tx1"/>
-            </a:fontRef>
-          </p:style>
-          <p:txBody>
-            <a:bodyPr rtlCol="0" anchor="ctr"/>
-            <a:lstStyle/>
-            <a:p>
-              <a:pPr algn="ctr"/>
-              <a:endParaRPr lang="en-CO" dirty="0"/>
-            </a:p>
-          </p:txBody>
-        </p:sp>
-        <p:sp>
-          <p:nvSpPr>
-            <p:cNvPr id="11" name="Right Brace 10">
-              <a:extLst>
-                <a:ext uri="{FF2B5EF4-FFF2-40B4-BE49-F238E27FC236}">
-                  <a16:creationId xmlns:a16="http://schemas.microsoft.com/office/drawing/2014/main" id="{B9E4FAC4-9EF5-7EE3-B812-6027F059B01D}"/>
-                </a:ext>
-              </a:extLst>
-            </p:cNvPr>
-            <p:cNvSpPr/>
-            <p:nvPr/>
-          </p:nvSpPr>
-          <p:spPr>
-            <a:xfrm rot="1651586">
-              <a:off x="4298581" y="1639714"/>
-              <a:ext cx="918888" cy="1117846"/>
-            </a:xfrm>
-            <a:prstGeom prst="rightBrace">
-              <a:avLst/>
-            </a:prstGeom>
-            <a:ln w="85725">
-              <a:solidFill>
-                <a:schemeClr val="accent2"/>
-              </a:solidFill>
-            </a:ln>
-          </p:spPr>
-          <p:style>
-            <a:lnRef idx="3">
-              <a:schemeClr val="accent2"/>
-            </a:lnRef>
-            <a:fillRef idx="0">
-              <a:schemeClr val="accent2"/>
-            </a:fillRef>
-            <a:effectRef idx="2">
-              <a:schemeClr val="accent2"/>
-            </a:effectRef>
-            <a:fontRef idx="minor">
-              <a:schemeClr val="tx1"/>
-            </a:fontRef>
-          </p:style>
-          <p:txBody>
-            <a:bodyPr rtlCol="0" anchor="ctr"/>
-            <a:lstStyle/>
-            <a:p>
-              <a:pPr algn="ctr"/>
-              <a:endParaRPr lang="en-CO"/>
-            </a:p>
-          </p:txBody>
-        </p:sp>
-        <p:sp>
-          <p:nvSpPr>
-            <p:cNvPr id="5" name="TextBox 4">
-              <a:extLst>
-                <a:ext uri="{FF2B5EF4-FFF2-40B4-BE49-F238E27FC236}">
-                  <a16:creationId xmlns:a16="http://schemas.microsoft.com/office/drawing/2014/main" id="{530FCDB4-2363-D1F5-8287-9A3A82EEF0A9}"/>
-                </a:ext>
-              </a:extLst>
-            </p:cNvPr>
-            <p:cNvSpPr txBox="1"/>
-            <p:nvPr/>
-          </p:nvSpPr>
-          <p:spPr>
-            <a:xfrm>
-              <a:off x="1588625" y="-8005"/>
-              <a:ext cx="2041742" cy="369332"/>
-            </a:xfrm>
-            <a:prstGeom prst="rect">
-              <a:avLst/>
-            </a:prstGeom>
+          <a:prstGeom prst="rect">
+            <a:avLst/>
+          </a:prstGeom>
+        </p:spPr>
+      </p:pic>
+      <p:sp>
+        <p:nvSpPr>
+          <p:cNvPr id="10" name="Right Brace 9">
+            <a:extLst>
+              <a:ext uri="{FF2B5EF4-FFF2-40B4-BE49-F238E27FC236}">
+                <a16:creationId xmlns:a16="http://schemas.microsoft.com/office/drawing/2014/main" id="{7CC3EDD9-7C7B-6CD5-85B0-1B0F4A5B2795}"/>
+              </a:ext>
+            </a:extLst>
+          </p:cNvPr>
+          <p:cNvSpPr/>
+          <p:nvPr/>
+        </p:nvSpPr>
+        <p:spPr>
+          <a:xfrm rot="7165058">
+            <a:off x="4008897" y="-643432"/>
+            <a:ext cx="1124402" cy="8463360"/>
+          </a:xfrm>
+          <a:prstGeom prst="rightBrace">
+            <a:avLst/>
+          </a:prstGeom>
+          <a:ln w="88900">
             <a:solidFill>
-              <a:schemeClr val="bg1">
-                <a:alpha val="78000"/>
+              <a:schemeClr val="accent2">
+                <a:alpha val="95000"/>
               </a:schemeClr>
             </a:solidFill>
-          </p:spPr>
-          <p:txBody>
-            <a:bodyPr wrap="square" rtlCol="0">
-              <a:spAutoFit/>
-            </a:bodyPr>
-            <a:lstStyle/>
-            <a:p>
-              <a:r>
-                <a:rPr lang="en-CO" dirty="0">
-                  <a:solidFill>
-                    <a:srgbClr val="FF0000"/>
-                  </a:solidFill>
-                </a:rPr>
-                <a:t>Calle 52 con 49</a:t>
-              </a:r>
-            </a:p>
-          </p:txBody>
-        </p:sp>
-        <p:sp>
-          <p:nvSpPr>
-            <p:cNvPr id="12" name="TextBox 11">
-              <a:extLst>
-                <a:ext uri="{FF2B5EF4-FFF2-40B4-BE49-F238E27FC236}">
-                  <a16:creationId xmlns:a16="http://schemas.microsoft.com/office/drawing/2014/main" id="{D6BF2CB5-2660-2660-3807-81F1B7C74342}"/>
-                </a:ext>
-              </a:extLst>
-            </p:cNvPr>
-            <p:cNvSpPr txBox="1"/>
-            <p:nvPr/>
-          </p:nvSpPr>
-          <p:spPr>
-            <a:xfrm>
-              <a:off x="2768160" y="4265458"/>
-              <a:ext cx="2542876" cy="646331"/>
-            </a:xfrm>
-            <a:prstGeom prst="rect">
-              <a:avLst/>
-            </a:prstGeom>
+          </a:ln>
+        </p:spPr>
+        <p:style>
+          <a:lnRef idx="3">
+            <a:schemeClr val="accent2"/>
+          </a:lnRef>
+          <a:fillRef idx="0">
+            <a:schemeClr val="accent2"/>
+          </a:fillRef>
+          <a:effectRef idx="2">
+            <a:schemeClr val="accent2"/>
+          </a:effectRef>
+          <a:fontRef idx="minor">
+            <a:schemeClr val="tx1"/>
+          </a:fontRef>
+        </p:style>
+        <p:txBody>
+          <a:bodyPr rtlCol="0" anchor="ctr"/>
+          <a:lstStyle/>
+          <a:p>
+            <a:pPr algn="ctr"/>
+            <a:endParaRPr lang="en-CO" dirty="0"/>
+          </a:p>
+        </p:txBody>
+      </p:sp>
+      <p:sp>
+        <p:nvSpPr>
+          <p:cNvPr id="11" name="Right Brace 10">
+            <a:extLst>
+              <a:ext uri="{FF2B5EF4-FFF2-40B4-BE49-F238E27FC236}">
+                <a16:creationId xmlns:a16="http://schemas.microsoft.com/office/drawing/2014/main" id="{B9E4FAC4-9EF5-7EE3-B812-6027F059B01D}"/>
+              </a:ext>
+            </a:extLst>
+          </p:cNvPr>
+          <p:cNvSpPr/>
+          <p:nvPr/>
+        </p:nvSpPr>
+        <p:spPr>
+          <a:xfrm rot="1651586">
+            <a:off x="4298581" y="1639714"/>
+            <a:ext cx="918888" cy="1117846"/>
+          </a:xfrm>
+          <a:prstGeom prst="rightBrace">
+            <a:avLst/>
+          </a:prstGeom>
+          <a:ln w="85725">
             <a:solidFill>
-              <a:schemeClr val="bg1">
-                <a:alpha val="78000"/>
-              </a:schemeClr>
+              <a:schemeClr val="accent2"/>
             </a:solidFill>
-          </p:spPr>
-          <p:txBody>
-            <a:bodyPr wrap="square" rtlCol="0">
-              <a:spAutoFit/>
-            </a:bodyPr>
-            <a:lstStyle/>
-            <a:p>
-              <a:r>
-                <a:rPr lang="en-CO" dirty="0">
-                  <a:solidFill>
-                    <a:srgbClr val="FF0000"/>
-                  </a:solidFill>
-                </a:rPr>
-                <a:t>|39 – 49| = 10 Carreras</a:t>
-              </a:r>
-            </a:p>
-            <a:p>
-              <a:r>
-                <a:rPr lang="en-CO" dirty="0">
-                  <a:solidFill>
-                    <a:srgbClr val="FF0000"/>
-                  </a:solidFill>
-                </a:rPr>
-                <a:t>(10x80 metros)    </a:t>
-              </a:r>
-            </a:p>
-          </p:txBody>
-        </p:sp>
-        <p:sp>
-          <p:nvSpPr>
-            <p:cNvPr id="9" name="TextBox 8">
-              <a:extLst>
-                <a:ext uri="{FF2B5EF4-FFF2-40B4-BE49-F238E27FC236}">
-                  <a16:creationId xmlns:a16="http://schemas.microsoft.com/office/drawing/2014/main" id="{65BADCA5-67FC-713C-9381-2B985FA1F319}"/>
-                </a:ext>
-              </a:extLst>
-            </p:cNvPr>
-            <p:cNvSpPr txBox="1"/>
-            <p:nvPr/>
-          </p:nvSpPr>
-          <p:spPr>
-            <a:xfrm>
-              <a:off x="8154445" y="5123304"/>
-              <a:ext cx="1705627" cy="369332"/>
-            </a:xfrm>
-            <a:prstGeom prst="rect">
-              <a:avLst/>
-            </a:prstGeom>
-            <a:solidFill>
-              <a:schemeClr val="bg1">
-                <a:alpha val="78000"/>
-              </a:schemeClr>
-            </a:solidFill>
-          </p:spPr>
-          <p:txBody>
-            <a:bodyPr wrap="square" rtlCol="0">
-              <a:spAutoFit/>
-            </a:bodyPr>
-            <a:lstStyle/>
-            <a:p>
-              <a:r>
-                <a:rPr lang="en-CO" dirty="0">
-                  <a:solidFill>
-                    <a:srgbClr val="FF0000"/>
-                  </a:solidFill>
-                </a:rPr>
-                <a:t>Cr 39 con 50</a:t>
-              </a:r>
-            </a:p>
-          </p:txBody>
-        </p:sp>
-        <p:sp>
-          <p:nvSpPr>
-            <p:cNvPr id="13" name="TextBox 12">
-              <a:extLst>
-                <a:ext uri="{FF2B5EF4-FFF2-40B4-BE49-F238E27FC236}">
-                  <a16:creationId xmlns:a16="http://schemas.microsoft.com/office/drawing/2014/main" id="{4F749713-7648-93C1-ECB2-5E480A626FFC}"/>
-                </a:ext>
-              </a:extLst>
-            </p:cNvPr>
-            <p:cNvSpPr txBox="1"/>
-            <p:nvPr/>
-          </p:nvSpPr>
-          <p:spPr>
-            <a:xfrm>
-              <a:off x="5382369" y="1875471"/>
-              <a:ext cx="2542876" cy="646331"/>
-            </a:xfrm>
-            <a:prstGeom prst="rect">
-              <a:avLst/>
-            </a:prstGeom>
-            <a:solidFill>
-              <a:schemeClr val="bg1">
-                <a:alpha val="78000"/>
-              </a:schemeClr>
-            </a:solidFill>
-          </p:spPr>
-          <p:txBody>
-            <a:bodyPr wrap="square" rtlCol="0">
-              <a:spAutoFit/>
-            </a:bodyPr>
-            <a:lstStyle/>
-            <a:p>
-              <a:r>
-                <a:rPr lang="en-CO" dirty="0">
-                  <a:solidFill>
-                    <a:srgbClr val="FF0000"/>
-                  </a:solidFill>
-                </a:rPr>
-                <a:t>|52 – 50| = 2 Calles</a:t>
-              </a:r>
-            </a:p>
-            <a:p>
-              <a:r>
-                <a:rPr lang="en-CO" dirty="0">
-                  <a:solidFill>
-                    <a:srgbClr val="FF0000"/>
-                  </a:solidFill>
-                </a:rPr>
-                <a:t>(2x80 metros)    </a:t>
-              </a:r>
-            </a:p>
-          </p:txBody>
-        </p:sp>
-      </p:grpSp>
+          </a:ln>
+        </p:spPr>
+        <p:style>
+          <a:lnRef idx="3">
+            <a:schemeClr val="accent2"/>
+          </a:lnRef>
+          <a:fillRef idx="0">
+            <a:schemeClr val="accent2"/>
+          </a:fillRef>
+          <a:effectRef idx="2">
+            <a:schemeClr val="accent2"/>
+          </a:effectRef>
+          <a:fontRef idx="minor">
+            <a:schemeClr val="tx1"/>
+          </a:fontRef>
+        </p:style>
+        <p:txBody>
+          <a:bodyPr rtlCol="0" anchor="ctr"/>
+          <a:lstStyle/>
+          <a:p>
+            <a:pPr algn="ctr"/>
+            <a:endParaRPr lang="en-CO"/>
+          </a:p>
+        </p:txBody>
+      </p:sp>
+      <p:sp>
+        <p:nvSpPr>
+          <p:cNvPr id="5" name="TextBox 4">
+            <a:extLst>
+              <a:ext uri="{FF2B5EF4-FFF2-40B4-BE49-F238E27FC236}">
+                <a16:creationId xmlns:a16="http://schemas.microsoft.com/office/drawing/2014/main" id="{530FCDB4-2363-D1F5-8287-9A3A82EEF0A9}"/>
+              </a:ext>
+            </a:extLst>
+          </p:cNvPr>
+          <p:cNvSpPr txBox="1"/>
+          <p:nvPr/>
+        </p:nvSpPr>
+        <p:spPr>
+          <a:xfrm>
+            <a:off x="1588625" y="-8005"/>
+            <a:ext cx="2041742" cy="369332"/>
+          </a:xfrm>
+          <a:prstGeom prst="rect">
+            <a:avLst/>
+          </a:prstGeom>
+          <a:solidFill>
+            <a:schemeClr val="bg1">
+              <a:alpha val="78000"/>
+            </a:schemeClr>
+          </a:solidFill>
+        </p:spPr>
+        <p:txBody>
+          <a:bodyPr wrap="square" rtlCol="0">
+            <a:spAutoFit/>
+          </a:bodyPr>
+          <a:lstStyle/>
+          <a:p>
+            <a:r>
+              <a:rPr lang="en-CO" dirty="0">
+                <a:solidFill>
+                  <a:srgbClr val="FF0000"/>
+                </a:solidFill>
+              </a:rPr>
+              <a:t>Calle 52 con 49</a:t>
+            </a:r>
+          </a:p>
+        </p:txBody>
+      </p:sp>
+      <p:sp>
+        <p:nvSpPr>
+          <p:cNvPr id="12" name="TextBox 11">
+            <a:extLst>
+              <a:ext uri="{FF2B5EF4-FFF2-40B4-BE49-F238E27FC236}">
+                <a16:creationId xmlns:a16="http://schemas.microsoft.com/office/drawing/2014/main" id="{D6BF2CB5-2660-2660-3807-81F1B7C74342}"/>
+              </a:ext>
+            </a:extLst>
+          </p:cNvPr>
+          <p:cNvSpPr txBox="1"/>
+          <p:nvPr/>
+        </p:nvSpPr>
+        <p:spPr>
+          <a:xfrm>
+            <a:off x="2768160" y="4265458"/>
+            <a:ext cx="2542876" cy="646331"/>
+          </a:xfrm>
+          <a:prstGeom prst="rect">
+            <a:avLst/>
+          </a:prstGeom>
+          <a:solidFill>
+            <a:schemeClr val="bg1">
+              <a:alpha val="78000"/>
+            </a:schemeClr>
+          </a:solidFill>
+        </p:spPr>
+        <p:txBody>
+          <a:bodyPr wrap="square" rtlCol="0">
+            <a:spAutoFit/>
+          </a:bodyPr>
+          <a:lstStyle/>
+          <a:p>
+            <a:r>
+              <a:rPr lang="en-CO" dirty="0">
+                <a:solidFill>
+                  <a:srgbClr val="FF0000"/>
+                </a:solidFill>
+              </a:rPr>
+              <a:t>|39 – 49| = 10 Carreras</a:t>
+            </a:r>
+          </a:p>
+          <a:p>
+            <a:r>
+              <a:rPr lang="en-CO" dirty="0">
+                <a:solidFill>
+                  <a:srgbClr val="FF0000"/>
+                </a:solidFill>
+              </a:rPr>
+              <a:t>(10x80 metros)    </a:t>
+            </a:r>
+          </a:p>
+        </p:txBody>
+      </p:sp>
+      <p:sp>
+        <p:nvSpPr>
+          <p:cNvPr id="9" name="TextBox 8">
+            <a:extLst>
+              <a:ext uri="{FF2B5EF4-FFF2-40B4-BE49-F238E27FC236}">
+                <a16:creationId xmlns:a16="http://schemas.microsoft.com/office/drawing/2014/main" id="{65BADCA5-67FC-713C-9381-2B985FA1F319}"/>
+              </a:ext>
+            </a:extLst>
+          </p:cNvPr>
+          <p:cNvSpPr txBox="1"/>
+          <p:nvPr/>
+        </p:nvSpPr>
+        <p:spPr>
+          <a:xfrm>
+            <a:off x="8154445" y="5123304"/>
+            <a:ext cx="1705627" cy="369332"/>
+          </a:xfrm>
+          <a:prstGeom prst="rect">
+            <a:avLst/>
+          </a:prstGeom>
+          <a:solidFill>
+            <a:schemeClr val="bg1">
+              <a:alpha val="78000"/>
+            </a:schemeClr>
+          </a:solidFill>
+        </p:spPr>
+        <p:txBody>
+          <a:bodyPr wrap="square" rtlCol="0">
+            <a:spAutoFit/>
+          </a:bodyPr>
+          <a:lstStyle/>
+          <a:p>
+            <a:r>
+              <a:rPr lang="en-CO" dirty="0">
+                <a:solidFill>
+                  <a:srgbClr val="FF0000"/>
+                </a:solidFill>
+              </a:rPr>
+              <a:t>Cr 39 con 50</a:t>
+            </a:r>
+          </a:p>
+        </p:txBody>
+      </p:sp>
+      <p:sp>
+        <p:nvSpPr>
+          <p:cNvPr id="13" name="TextBox 12">
+            <a:extLst>
+              <a:ext uri="{FF2B5EF4-FFF2-40B4-BE49-F238E27FC236}">
+                <a16:creationId xmlns:a16="http://schemas.microsoft.com/office/drawing/2014/main" id="{4F749713-7648-93C1-ECB2-5E480A626FFC}"/>
+              </a:ext>
+            </a:extLst>
+          </p:cNvPr>
+          <p:cNvSpPr txBox="1"/>
+          <p:nvPr/>
+        </p:nvSpPr>
+        <p:spPr>
+          <a:xfrm>
+            <a:off x="5382369" y="1875471"/>
+            <a:ext cx="2542876" cy="646331"/>
+          </a:xfrm>
+          <a:prstGeom prst="rect">
+            <a:avLst/>
+          </a:prstGeom>
+          <a:solidFill>
+            <a:schemeClr val="bg1">
+              <a:alpha val="78000"/>
+            </a:schemeClr>
+          </a:solidFill>
+        </p:spPr>
+        <p:txBody>
+          <a:bodyPr wrap="square" rtlCol="0">
+            <a:spAutoFit/>
+          </a:bodyPr>
+          <a:lstStyle/>
+          <a:p>
+            <a:r>
+              <a:rPr lang="en-CO" dirty="0">
+                <a:solidFill>
+                  <a:srgbClr val="FF0000"/>
+                </a:solidFill>
+              </a:rPr>
+              <a:t>|52 – 50| = 2 Calles</a:t>
+            </a:r>
+          </a:p>
+          <a:p>
+            <a:r>
+              <a:rPr lang="en-CO" dirty="0">
+                <a:solidFill>
+                  <a:srgbClr val="FF0000"/>
+                </a:solidFill>
+              </a:rPr>
+              <a:t>(2x80 metros)    </a:t>
+            </a:r>
+          </a:p>
+        </p:txBody>
+      </p:sp>
     </p:spTree>
     <p:extLst>
       <p:ext uri="{BB962C8B-B14F-4D97-AF65-F5344CB8AC3E}">
